--- a/Objetivos Prioritarios/Salidas/informe_detenidos_vicefiscalia.pptx
+++ b/Objetivos Prioritarios/Salidas/informe_detenidos_vicefiscalia.pptx
@@ -5,11 +5,11 @@
     <p:sldMasterId id="2147483648" r:id="rId1"/>
   </p:sldMasterIdLst>
   <p:sldIdLst>
-    <p:sldId id="257" r:id="R465a23ca0b9d43d4"/>
-    <p:sldId id="258" r:id="R50906a8801cd431e"/>
-    <p:sldId id="259" r:id="Rbae23d2aee054637"/>
-    <p:sldId id="260" r:id="R465be326cd184f0c"/>
-    <p:sldId id="261" r:id="R6be17a91d02b4bab"/>
+    <p:sldId id="257" r:id="Rbe960249f3c440cd"/>
+    <p:sldId id="258" r:id="Rf839f5012c584ef0"/>
+    <p:sldId id="259" r:id="Rfeb9686bd8d34f8b"/>
+    <p:sldId id="260" r:id="R76aacb1933454397"/>
+    <p:sldId id="261" r:id="R41b079af81094dc8"/>
   </p:sldIdLst>
   <p:sldSz cx="12192000" cy="6858000"/>
   <p:notesSz cx="6858000" cy="9144000"/>
@@ -3618,7 +3618,7 @@
           <p:nvPr>
             <p:extLst>
               <p:ext uri="{D42A27DB-BD31-4B8C-83A1-F6EECF244321}">
-                <p14:modId xmlns:p14="http://schemas.microsoft.com/office/powerpoint/2010/main" val="3793104443"/>
+                <p14:modId xmlns:p14="http://schemas.microsoft.com/office/powerpoint/2010/main" val="3363756650"/>
               </p:ext>
             </p:extLst>
           </p:nvPr>
@@ -4251,12 +4251,12 @@
                     <a:bodyPr/>
                     <a:lstStyle/>
                     <a:p>
-                      <a:pPr marL="342900" indent="-342900" algn="just">
+                      <a:pPr marL="0" indent="0" algn="just">
                         <a:buFont typeface="Arial" panose="020B0604020202020204" pitchFamily="34" charset="0"/>
-                        <a:buChar char="•"/>
+                        <a:buNone/>
                       </a:pPr>
                       <a:r>
-                        <a:rPr lang="es-MX" sz="1200" b="0" i="0" u="none" strike="noStrike" kern="1200" cap="none" spc="0" baseline="0" dirty="0">
+                        <a:rPr lang="es-MX" sz="1200" b="0" i="0" u="none" strike="noStrike" kern="1200" cap="none" spc="0" baseline="0">
                           <a:solidFill>
                             <a:schemeClr val="bg2">
                               <a:lumMod val="10000"/>
@@ -4268,8 +4268,20 @@
                           <a:cs typeface="+mn-cs"/>
                           <a:sym typeface="Helvetica Neue"/>
                         </a:rPr>
-                        <a:t>Autor intelectual del ataque perpetrado en contra de elementos de la Comisaria General el día 22 de septiembre del año 2022, en las inmediaciones de Fracc. Valle del Real, Rincón de Romos, Aguascalientes. </a:t>
+                        <a:t>[C13]</a:t>
                       </a:r>
+                      <a:endParaRPr lang="es-MX" sz="1200" b="0" i="0" u="none" strike="noStrike" kern="1200" cap="none" spc="0" baseline="0" dirty="0">
+                        <a:solidFill>
+                          <a:schemeClr val="bg2">
+                            <a:lumMod val="10000"/>
+                          </a:schemeClr>
+                        </a:solidFill>
+                        <a:uFillTx/>
+                        <a:latin typeface="+mj-lt"/>
+                        <a:ea typeface="+mn-ea"/>
+                        <a:cs typeface="+mn-cs"/>
+                        <a:sym typeface="Helvetica Neue"/>
+                      </a:endParaRPr>
                     </a:p>
                   </a:txBody>
                   <a:tcPr marL="45720" marR="45720" marT="22860" marB="22860">
@@ -4591,7 +4603,7 @@
                           <a:cs typeface="+mn-cs"/>
                           <a:sym typeface="Helvetica Neue"/>
                         </a:rPr>
-                        <a:t>[C9]</a:t>
+                        <a:t>[C5]</a:t>
                       </a:r>
                       <a:endParaRPr kumimoji="0" lang="es-MX" sz="1200" b="0" i="0" u="none" strike="noStrike" cap="none" spc="0" normalizeH="0" dirty="0">
                         <a:ln>
@@ -5075,7 +5087,7 @@
           <p:nvPr/>
         </p:nvPicPr>
         <p:blipFill>
-          <a:blip r:embed="R3fa23a5755244d71"/>
+          <a:blip r:embed="R6928200032b341e3"/>
           <a:stretch>
             <a:fillRect/>
           </a:stretch>
@@ -5108,7 +5120,7 @@
           <p:nvPr/>
         </p:nvPicPr>
         <p:blipFill rotWithShape="1">
-          <a:blip r:embed="R5c0f41128b6b4b90">
+          <a:blip r:embed="Rbc3b19f4aed64229">
             <a:extLst>
               <a:ext uri="{28A0092B-C50C-407E-A947-70E740481C1C}">
                 <a14:useLocalDpi xmlns:a14="http://schemas.microsoft.com/office/drawing/2010/main" val="0"/>
@@ -5353,7 +5365,7 @@
           <p:nvPr>
             <p:extLst>
               <p:ext uri="{D42A27DB-BD31-4B8C-83A1-F6EECF244321}">
-                <p14:modId xmlns:p14="http://schemas.microsoft.com/office/powerpoint/2010/main" val="3793104443"/>
+                <p14:modId xmlns:p14="http://schemas.microsoft.com/office/powerpoint/2010/main" val="3363756650"/>
               </p:ext>
             </p:extLst>
           </p:nvPr>
@@ -5997,12 +6009,12 @@
                     <a:bodyPr/>
                     <a:lstStyle/>
                     <a:p>
-                      <a:pPr marL="342900" indent="-342900" algn="just">
+                      <a:pPr marL="0" indent="0" algn="just">
                         <a:buFont typeface="Arial" panose="020B0604020202020204" pitchFamily="34" charset="0"/>
-                        <a:buChar char="•"/>
+                        <a:buNone/>
                       </a:pPr>
                       <a:r>
-                        <a:rPr lang="es-MX" sz="1200" b="0" i="0" u="none" strike="noStrike" kern="1200" cap="none" spc="0" baseline="0" dirty="0">
+                        <a:rPr lang="es-MX" sz="1200" b="0" i="0" u="none" strike="noStrike" kern="1200" cap="none" spc="0" baseline="0">
                           <a:solidFill>
                             <a:schemeClr val="bg2">
                               <a:lumMod val="10000"/>
@@ -6014,8 +6026,20 @@
                           <a:cs typeface="+mn-cs"/>
                           <a:sym typeface="Helvetica Neue"/>
                         </a:rPr>
-                        <a:t>Autor intelectual del ataque perpetrado en contra de elementos de la Comisaria General el día 22 de septiembre del año 2022, en las inmediaciones de Fracc. Valle del Real, Rincón de Romos, Aguascalientes. </a:t>
+                        <a:t>Fujitivo altamente peligroso</a:t>
                       </a:r>
+                      <a:endParaRPr lang="es-MX" sz="1200" b="0" i="0" u="none" strike="noStrike" kern="1200" cap="none" spc="0" baseline="0" dirty="0">
+                        <a:solidFill>
+                          <a:schemeClr val="bg2">
+                            <a:lumMod val="10000"/>
+                          </a:schemeClr>
+                        </a:solidFill>
+                        <a:uFillTx/>
+                        <a:latin typeface="+mj-lt"/>
+                        <a:ea typeface="+mn-ea"/>
+                        <a:cs typeface="+mn-cs"/>
+                        <a:sym typeface="Helvetica Neue"/>
+                      </a:endParaRPr>
                     </a:p>
                   </a:txBody>
                   <a:tcPr marL="45720" marR="45720" marT="22860" marB="22860">
@@ -6177,7 +6201,7 @@
                           <a:ea typeface="+mn-ea"/>
                           <a:cs typeface="+mn-cs"/>
                         </a:rPr>
-                        <a:t>Sentenciado, se sentencio por violacion a la persona</a:t>
+                        <a:t>Sentenciado, Se sentencio por violación a la persona</a:t>
                       </a:r>
                     </a:p>
                   </a:txBody>
@@ -6337,8 +6361,12 @@
                           <a:cs typeface="+mn-cs"/>
                           <a:sym typeface="Helvetica Neue"/>
                         </a:rPr>
-                        <a:t>Caso doña Juana  LEO Occisos Ma. Juana Montoya Gonzáles y Juan Gabriel Gutiérrez Marín, hechos ocurridos el 27 de junio de 2022, cuando las victimas en primera instancia fueron privados de su libertad en su domicilio ubicado en el municipio de Rincón de Romos y posteriormente  localizados sin vida en las inmediaciones del predio rustico “el charquito
-LEO 588</a:t>
+                        <a:t>
+• CI/AGS/01228/01-23 Privación ilegal de la libertad
+• CI/AGS/01718/01-23 Contra la Salud
+• CI/AGS/06518/03-23 Privación ilegal de la libertad
+• CI/AGS/11529/05-20 Contra la Salud
+• DGAP/AGS/06938/05-11 Robo calificado</a:t>
                       </a:r>
                       <a:endParaRPr kumimoji="0" lang="es-MX" sz="1200" b="0" i="0" u="none" strike="noStrike" cap="none" spc="0" normalizeH="0" dirty="0">
                         <a:ln>
@@ -6822,7 +6850,7 @@
           <p:nvPr/>
         </p:nvPicPr>
         <p:blipFill>
-          <a:blip r:embed="R1d00059520d54aee"/>
+          <a:blip r:embed="Rb687c3b98b134a92"/>
           <a:stretch>
             <a:fillRect/>
           </a:stretch>
@@ -6855,7 +6883,7 @@
           <p:nvPr/>
         </p:nvPicPr>
         <p:blipFill rotWithShape="1">
-          <a:blip r:embed="Reb9ef756ef3d4047">
+          <a:blip r:embed="R15d00f4c93114687">
             <a:extLst>
               <a:ext uri="{28A0092B-C50C-407E-A947-70E740481C1C}">
                 <a14:useLocalDpi xmlns:a14="http://schemas.microsoft.com/office/drawing/2010/main" val="0"/>
@@ -7100,7 +7128,7 @@
           <p:nvPr>
             <p:extLst>
               <p:ext uri="{D42A27DB-BD31-4B8C-83A1-F6EECF244321}">
-                <p14:modId xmlns:p14="http://schemas.microsoft.com/office/powerpoint/2010/main" val="3793104443"/>
+                <p14:modId xmlns:p14="http://schemas.microsoft.com/office/powerpoint/2010/main" val="3363756650"/>
               </p:ext>
             </p:extLst>
           </p:nvPr>
@@ -7736,12 +7764,12 @@
                     <a:bodyPr/>
                     <a:lstStyle/>
                     <a:p>
-                      <a:pPr marL="342900" indent="-342900" algn="just">
+                      <a:pPr marL="0" indent="0" algn="just">
                         <a:buFont typeface="Arial" panose="020B0604020202020204" pitchFamily="34" charset="0"/>
-                        <a:buChar char="•"/>
+                        <a:buNone/>
                       </a:pPr>
                       <a:r>
-                        <a:rPr lang="es-MX" sz="1200" b="0" i="0" u="none" strike="noStrike" kern="1200" cap="none" spc="0" baseline="0" dirty="0">
+                        <a:rPr lang="es-MX" sz="1200" b="0" i="0" u="none" strike="noStrike" kern="1200" cap="none" spc="0" baseline="0">
                           <a:solidFill>
                             <a:schemeClr val="bg2">
                               <a:lumMod val="10000"/>
@@ -7753,8 +7781,20 @@
                           <a:cs typeface="+mn-cs"/>
                           <a:sym typeface="Helvetica Neue"/>
                         </a:rPr>
-                        <a:t>Autor intelectual del ataque perpetrado en contra de elementos de la Comisaria General el día 22 de septiembre del año 2022, en las inmediaciones de Fracc. Valle del Real, Rincón de Romos, Aguascalientes. </a:t>
+                        <a:t/>
                       </a:r>
+                      <a:endParaRPr lang="es-MX" sz="1200" b="0" i="0" u="none" strike="noStrike" kern="1200" cap="none" spc="0" baseline="0" dirty="0">
+                        <a:solidFill>
+                          <a:schemeClr val="bg2">
+                            <a:lumMod val="10000"/>
+                          </a:schemeClr>
+                        </a:solidFill>
+                        <a:uFillTx/>
+                        <a:latin typeface="+mj-lt"/>
+                        <a:ea typeface="+mn-ea"/>
+                        <a:cs typeface="+mn-cs"/>
+                        <a:sym typeface="Helvetica Neue"/>
+                      </a:endParaRPr>
                     </a:p>
                   </a:txBody>
                   <a:tcPr marL="45720" marR="45720" marT="22860" marB="22860">
@@ -8076,8 +8116,12 @@
                           <a:cs typeface="+mn-cs"/>
                           <a:sym typeface="Helvetica Neue"/>
                         </a:rPr>
-                        <a:t>Sin Alias del Caso Hechos ocurridos el día 09 de marzo del 2023, cuando RICARDO OMAR HERRERA GUERRERO ALÍAS “PIOJO” Y/O “EL CHASCAS” Y/O “CHASQUERO”, irrumpió en el domicilio  ubicado en  calle 16 de septiembre Sur, número 706, en la Colonia Independencia, perteneciente al Municipio de Rincón de Romos, Aguascalientes, cuando las victimas de identidad reservada Victimas de identidad reservada A.G.P.H. y U.F.R.O. (Aún no localizadas) se encontraban en el interior. Sacándolas de dicho domicilio y llevándoselas a bordo de un vehículo, esto haciendo uso de la violencia, sin que hasta el momento se conozca su paradero. 
-</a:t>
+                        <a:t>
+• CI/AGS/06518/03-23 Privación ilegal de la libertad
+• CI/RIN/00175/03-23 Contra la Salud
+• CI/RIN/00270/05-17 Robo calificado
+• CI/RIN/00343/05-23 Contra la Salud
+• CI/RIN/00351/06-22 Robo calificado</a:t>
                       </a:r>
                       <a:endParaRPr kumimoji="0" lang="es-MX" sz="1200" b="0" i="0" u="none" strike="noStrike" cap="none" spc="0" normalizeH="0" dirty="0">
                         <a:ln>
@@ -8561,7 +8605,7 @@
           <p:nvPr/>
         </p:nvPicPr>
         <p:blipFill>
-          <a:blip r:embed="R159474768bcb4ae0"/>
+          <a:blip r:embed="R2c92afead4cd4be2"/>
           <a:stretch>
             <a:fillRect/>
           </a:stretch>
@@ -8594,7 +8638,7 @@
           <p:nvPr/>
         </p:nvPicPr>
         <p:blipFill rotWithShape="1">
-          <a:blip r:embed="R620092cb0ab84cc8">
+          <a:blip r:embed="R0e3716e59e25440e">
             <a:extLst>
               <a:ext uri="{28A0092B-C50C-407E-A947-70E740481C1C}">
                 <a14:useLocalDpi xmlns:a14="http://schemas.microsoft.com/office/drawing/2010/main" val="0"/>
@@ -8839,7 +8883,7 @@
           <p:nvPr>
             <p:extLst>
               <p:ext uri="{D42A27DB-BD31-4B8C-83A1-F6EECF244321}">
-                <p14:modId xmlns:p14="http://schemas.microsoft.com/office/powerpoint/2010/main" val="3793104443"/>
+                <p14:modId xmlns:p14="http://schemas.microsoft.com/office/powerpoint/2010/main" val="3363756650"/>
               </p:ext>
             </p:extLst>
           </p:nvPr>
@@ -9479,12 +9523,12 @@
                     <a:bodyPr/>
                     <a:lstStyle/>
                     <a:p>
-                      <a:pPr marL="342900" indent="-342900" algn="just">
+                      <a:pPr marL="0" indent="0" algn="just">
                         <a:buFont typeface="Arial" panose="020B0604020202020204" pitchFamily="34" charset="0"/>
-                        <a:buChar char="•"/>
+                        <a:buNone/>
                       </a:pPr>
                       <a:r>
-                        <a:rPr lang="es-MX" sz="1200" b="0" i="0" u="none" strike="noStrike" kern="1200" cap="none" spc="0" baseline="0" dirty="0">
+                        <a:rPr lang="es-MX" sz="1200" b="0" i="0" u="none" strike="noStrike" kern="1200" cap="none" spc="0" baseline="0">
                           <a:solidFill>
                             <a:schemeClr val="bg2">
                               <a:lumMod val="10000"/>
@@ -9496,8 +9540,20 @@
                           <a:cs typeface="+mn-cs"/>
                           <a:sym typeface="Helvetica Neue"/>
                         </a:rPr>
-                        <a:t>Autor intelectual del ataque perpetrado en contra de elementos de la Comisaria General el día 22 de septiembre del año 2022, en las inmediaciones de Fracc. Valle del Real, Rincón de Romos, Aguascalientes. </a:t>
+                        <a:t/>
                       </a:r>
+                      <a:endParaRPr lang="es-MX" sz="1200" b="0" i="0" u="none" strike="noStrike" kern="1200" cap="none" spc="0" baseline="0" dirty="0">
+                        <a:solidFill>
+                          <a:schemeClr val="bg2">
+                            <a:lumMod val="10000"/>
+                          </a:schemeClr>
+                        </a:solidFill>
+                        <a:uFillTx/>
+                        <a:latin typeface="+mj-lt"/>
+                        <a:ea typeface="+mn-ea"/>
+                        <a:cs typeface="+mn-cs"/>
+                        <a:sym typeface="Helvetica Neue"/>
+                      </a:endParaRPr>
                     </a:p>
                   </a:txBody>
                   <a:tcPr marL="45720" marR="45720" marT="22860" marB="22860">
@@ -9819,7 +9875,17 @@
                           <a:cs typeface="+mn-cs"/>
                           <a:sym typeface="Helvetica Neue"/>
                         </a:rPr>
-                        <a:t>Caso Jassiel Hechos en agravio de Jassiel Díaz Cardona, el pasado 30 de mayo de 2023, en el rancho conocido como  “la fogata” Potrero Salitrillo Monte, Rincón de Romos, Aguascalientes, cuando la victima viajaba a bordo de su automóvil Ford Focus sobre la carretera 22, fue perseguido por los responsables  Jonathan Josefath Castorena Rodríguez alias patroncito, Javier Esquivel Padilla alias “La Queta” y Ricardo Alberto Navarro Gonzales alias “El Ricas”, quienes lo alcanzaron para herirlo con disparos por arma de fuego, la victima falleció minutos mas tarde en el Hospital General de Rincón de Romos.</a:t>
+                        <a:t>
+• A-08/02876 Violacion equiparada
+• CI/PAB/00072/01-21 Amenazas
+• CI/RIN/00542/09-22 Violencia familiar
+• R-07/00017 Daño en las cosas doloso
+• R-07/00019 Robo calificado
+• R-07/00031 Daño en las cosas doloso
+• R-07/00102 Robo calificado
+• R-07/00147 Robo calificado
+• R-07/00182 Daño en las cosas doloso
+• R-07/00227 Lesiones dolosas calificadas por golpes</a:t>
                       </a:r>
                       <a:endParaRPr kumimoji="0" lang="es-MX" sz="1200" b="0" i="0" u="none" strike="noStrike" cap="none" spc="0" normalizeH="0" dirty="0">
                         <a:ln>
@@ -10303,7 +10369,7 @@
           <p:nvPr/>
         </p:nvPicPr>
         <p:blipFill>
-          <a:blip r:embed="Rdb20565d6f0940ec"/>
+          <a:blip r:embed="R0a600ddb8e4648fa"/>
           <a:stretch>
             <a:fillRect/>
           </a:stretch>
@@ -10336,7 +10402,7 @@
           <p:nvPr/>
         </p:nvPicPr>
         <p:blipFill rotWithShape="1">
-          <a:blip r:embed="R466054cae22948c8">
+          <a:blip r:embed="R2429dcecb3c446aa">
             <a:extLst>
               <a:ext uri="{28A0092B-C50C-407E-A947-70E740481C1C}">
                 <a14:useLocalDpi xmlns:a14="http://schemas.microsoft.com/office/drawing/2010/main" val="0"/>
@@ -10581,7 +10647,7 @@
           <p:nvPr>
             <p:extLst>
               <p:ext uri="{D42A27DB-BD31-4B8C-83A1-F6EECF244321}">
-                <p14:modId xmlns:p14="http://schemas.microsoft.com/office/powerpoint/2010/main" val="3793104443"/>
+                <p14:modId xmlns:p14="http://schemas.microsoft.com/office/powerpoint/2010/main" val="3363756650"/>
               </p:ext>
             </p:extLst>
           </p:nvPr>
@@ -11217,12 +11283,12 @@
                     <a:bodyPr/>
                     <a:lstStyle/>
                     <a:p>
-                      <a:pPr marL="342900" indent="-342900" algn="just">
+                      <a:pPr marL="0" indent="0" algn="just">
                         <a:buFont typeface="Arial" panose="020B0604020202020204" pitchFamily="34" charset="0"/>
-                        <a:buChar char="•"/>
+                        <a:buNone/>
                       </a:pPr>
                       <a:r>
-                        <a:rPr lang="es-MX" sz="1200" b="0" i="0" u="none" strike="noStrike" kern="1200" cap="none" spc="0" baseline="0" dirty="0">
+                        <a:rPr lang="es-MX" sz="1200" b="0" i="0" u="none" strike="noStrike" kern="1200" cap="none" spc="0" baseline="0">
                           <a:solidFill>
                             <a:schemeClr val="bg2">
                               <a:lumMod val="10000"/>
@@ -11234,8 +11300,20 @@
                           <a:cs typeface="+mn-cs"/>
                           <a:sym typeface="Helvetica Neue"/>
                         </a:rPr>
-                        <a:t>Autor intelectual del ataque perpetrado en contra de elementos de la Comisaria General el día 22 de septiembre del año 2022, en las inmediaciones de Fracc. Valle del Real, Rincón de Romos, Aguascalientes. </a:t>
+                        <a:t/>
                       </a:r>
+                      <a:endParaRPr lang="es-MX" sz="1200" b="0" i="0" u="none" strike="noStrike" kern="1200" cap="none" spc="0" baseline="0" dirty="0">
+                        <a:solidFill>
+                          <a:schemeClr val="bg2">
+                            <a:lumMod val="10000"/>
+                          </a:schemeClr>
+                        </a:solidFill>
+                        <a:uFillTx/>
+                        <a:latin typeface="+mj-lt"/>
+                        <a:ea typeface="+mn-ea"/>
+                        <a:cs typeface="+mn-cs"/>
+                        <a:sym typeface="Helvetica Neue"/>
+                      </a:endParaRPr>
                     </a:p>
                   </a:txBody>
                   <a:tcPr marL="45720" marR="45720" marT="22860" marB="22860">
@@ -11557,7 +11635,8 @@
                           <a:cs typeface="+mn-cs"/>
                           <a:sym typeface="Helvetica Neue"/>
                         </a:rPr>
-                        <a:t>Caso Jassiel Hechos en agravio de Jassiel Díaz Cardona, el pasado 30 de mayo de 2023, en el rancho conocido como  “la fogata” Potrero Salitrillo Monte, Rincón de Romos, Aguascalientes, cuando la victima viajaba a bordo de su automóvil Ford Focus sobre la carretera 22, fue perseguido por los responsables  Jonathan Josefath Castorena Rodríguez alias patroncito, Javier Esquivel Padilla alias “La Queta” y Ricardo Alberto Navarro Gonzales alias “El Ricas”, quienes lo alcanzaron para herirlo con disparos por arma de fuego, la victima falleció minutos mas tarde en el Hospital General de Rincón de Romos.</a:t>
+                        <a:t>
+• CI/AGS/10918/05-19 Lesiones dolosas calificadas por golpes</a:t>
                       </a:r>
                       <a:endParaRPr kumimoji="0" lang="es-MX" sz="1200" b="0" i="0" u="none" strike="noStrike" cap="none" spc="0" normalizeH="0" dirty="0">
                         <a:ln>
@@ -12041,7 +12120,7 @@
           <p:nvPr/>
         </p:nvPicPr>
         <p:blipFill>
-          <a:blip r:embed="R479b1aa79daa4bcb"/>
+          <a:blip r:embed="R6b190e7c5c8047b7"/>
           <a:stretch>
             <a:fillRect/>
           </a:stretch>
@@ -12074,7 +12153,7 @@
           <p:nvPr/>
         </p:nvPicPr>
         <p:blipFill rotWithShape="1">
-          <a:blip r:embed="R2e616940510d4e6c">
+          <a:blip r:embed="R3846afef12554268">
             <a:extLst>
               <a:ext uri="{28A0092B-C50C-407E-A947-70E740481C1C}">
                 <a14:useLocalDpi xmlns:a14="http://schemas.microsoft.com/office/drawing/2010/main" val="0"/>
@@ -12319,7 +12398,7 @@
           <p:nvPr>
             <p:extLst>
               <p:ext uri="{D42A27DB-BD31-4B8C-83A1-F6EECF244321}">
-                <p14:modId xmlns:p14="http://schemas.microsoft.com/office/powerpoint/2010/main" val="3793104443"/>
+                <p14:modId xmlns:p14="http://schemas.microsoft.com/office/powerpoint/2010/main" val="3363756650"/>
               </p:ext>
             </p:extLst>
           </p:nvPr>
@@ -12955,12 +13034,12 @@
                     <a:bodyPr/>
                     <a:lstStyle/>
                     <a:p>
-                      <a:pPr marL="342900" indent="-342900" algn="just">
+                      <a:pPr marL="0" indent="0" algn="just">
                         <a:buFont typeface="Arial" panose="020B0604020202020204" pitchFamily="34" charset="0"/>
-                        <a:buChar char="•"/>
+                        <a:buNone/>
                       </a:pPr>
                       <a:r>
-                        <a:rPr lang="es-MX" sz="1200" b="0" i="0" u="none" strike="noStrike" kern="1200" cap="none" spc="0" baseline="0" dirty="0">
+                        <a:rPr lang="es-MX" sz="1200" b="0" i="0" u="none" strike="noStrike" kern="1200" cap="none" spc="0" baseline="0">
                           <a:solidFill>
                             <a:schemeClr val="bg2">
                               <a:lumMod val="10000"/>
@@ -12972,8 +13051,20 @@
                           <a:cs typeface="+mn-cs"/>
                           <a:sym typeface="Helvetica Neue"/>
                         </a:rPr>
-                        <a:t>Autor intelectual del ataque perpetrado en contra de elementos de la Comisaria General el día 22 de septiembre del año 2022, en las inmediaciones de Fracc. Valle del Real, Rincón de Romos, Aguascalientes. </a:t>
+                        <a:t/>
                       </a:r>
+                      <a:endParaRPr lang="es-MX" sz="1200" b="0" i="0" u="none" strike="noStrike" kern="1200" cap="none" spc="0" baseline="0" dirty="0">
+                        <a:solidFill>
+                          <a:schemeClr val="bg2">
+                            <a:lumMod val="10000"/>
+                          </a:schemeClr>
+                        </a:solidFill>
+                        <a:uFillTx/>
+                        <a:latin typeface="+mj-lt"/>
+                        <a:ea typeface="+mn-ea"/>
+                        <a:cs typeface="+mn-cs"/>
+                        <a:sym typeface="Helvetica Neue"/>
+                      </a:endParaRPr>
                     </a:p>
                   </a:txBody>
                   <a:tcPr marL="45720" marR="45720" marT="22860" marB="22860">
@@ -13295,7 +13386,8 @@
                           <a:cs typeface="+mn-cs"/>
                           <a:sym typeface="Helvetica Neue"/>
                         </a:rPr>
-                        <a:t>Caso Jassiel Hechos en agravio de Jassiel Díaz Cardona, el pasado 30 de mayo de 2023, en el rancho conocido como  “la fogata” Potrero Salitrillo Monte, Rincón de Romos, Aguascalientes, cuando la victima viajaba a bordo de su automóvil Ford Focus sobre la carretera 22, fue perseguido por los responsables  Jonathan Josefath Castorena Rodríguez alias patroncito, Javier Esquivel Padilla alias “La Queta” y Ricardo Alberto Navarro Gonzales alias “El Ricas”, quienes lo alcanzaron para herirlo con disparos por arma de fuego, la victima falleció minutos mas tarde en el Hospital General de Rincón de Romos.</a:t>
+                        <a:t>
+• CI/RIN/00425/06-23 Contra la Salud</a:t>
                       </a:r>
                       <a:endParaRPr kumimoji="0" lang="es-MX" sz="1200" b="0" i="0" u="none" strike="noStrike" cap="none" spc="0" normalizeH="0" dirty="0">
                         <a:ln>

--- a/Objetivos Prioritarios/Salidas/informe_detenidos_vicefiscalia.pptx
+++ b/Objetivos Prioritarios/Salidas/informe_detenidos_vicefiscalia.pptx
@@ -5,11 +5,11 @@
     <p:sldMasterId id="2147483648" r:id="rId1"/>
   </p:sldMasterIdLst>
   <p:sldIdLst>
-    <p:sldId id="257" r:id="Rbe960249f3c440cd"/>
-    <p:sldId id="258" r:id="Rf839f5012c584ef0"/>
-    <p:sldId id="259" r:id="Rfeb9686bd8d34f8b"/>
-    <p:sldId id="260" r:id="R76aacb1933454397"/>
-    <p:sldId id="261" r:id="R41b079af81094dc8"/>
+    <p:sldId id="257" r:id="Rcd977b5e36d94201"/>
+    <p:sldId id="258" r:id="Rcd5f229cdd6546e5"/>
+    <p:sldId id="259" r:id="Ra2414a1bb5d44f97"/>
+    <p:sldId id="260" r:id="R84e0ebc6f84a4c9c"/>
+    <p:sldId id="261" r:id="R41d2eccf6c594197"/>
   </p:sldIdLst>
   <p:sldSz cx="12192000" cy="6858000"/>
   <p:notesSz cx="6858000" cy="9144000"/>
@@ -5087,7 +5087,7 @@
           <p:nvPr/>
         </p:nvPicPr>
         <p:blipFill>
-          <a:blip r:embed="R6928200032b341e3"/>
+          <a:blip r:embed="Ra98392aaf35f42fb"/>
           <a:stretch>
             <a:fillRect/>
           </a:stretch>
@@ -5120,7 +5120,7 @@
           <p:nvPr/>
         </p:nvPicPr>
         <p:blipFill rotWithShape="1">
-          <a:blip r:embed="Rbc3b19f4aed64229">
+          <a:blip r:embed="Rfb39a239004445c8">
             <a:extLst>
               <a:ext uri="{28A0092B-C50C-407E-A947-70E740481C1C}">
                 <a14:useLocalDpi xmlns:a14="http://schemas.microsoft.com/office/drawing/2010/main" val="0"/>
@@ -6026,7 +6026,7 @@
                           <a:cs typeface="+mn-cs"/>
                           <a:sym typeface="Helvetica Neue"/>
                         </a:rPr>
-                        <a:t>Fujitivo altamente peligroso</a:t>
+                        <a:t>Fugitivo altamente peligroso</a:t>
                       </a:r>
                       <a:endParaRPr lang="es-MX" sz="1200" b="0" i="0" u="none" strike="noStrike" kern="1200" cap="none" spc="0" baseline="0" dirty="0">
                         <a:solidFill>
@@ -6850,7 +6850,7 @@
           <p:nvPr/>
         </p:nvPicPr>
         <p:blipFill>
-          <a:blip r:embed="Rb687c3b98b134a92"/>
+          <a:blip r:embed="R2b7da3f5195248ff"/>
           <a:stretch>
             <a:fillRect/>
           </a:stretch>
@@ -6883,7 +6883,7 @@
           <p:nvPr/>
         </p:nvPicPr>
         <p:blipFill rotWithShape="1">
-          <a:blip r:embed="R15d00f4c93114687">
+          <a:blip r:embed="R6596218bfa924d8a">
             <a:extLst>
               <a:ext uri="{28A0092B-C50C-407E-A947-70E740481C1C}">
                 <a14:useLocalDpi xmlns:a14="http://schemas.microsoft.com/office/drawing/2010/main" val="0"/>
@@ -8605,7 +8605,7 @@
           <p:nvPr/>
         </p:nvPicPr>
         <p:blipFill>
-          <a:blip r:embed="R2c92afead4cd4be2"/>
+          <a:blip r:embed="R0f0ac7826a9642fe"/>
           <a:stretch>
             <a:fillRect/>
           </a:stretch>
@@ -8638,7 +8638,7 @@
           <p:nvPr/>
         </p:nvPicPr>
         <p:blipFill rotWithShape="1">
-          <a:blip r:embed="R0e3716e59e25440e">
+          <a:blip r:embed="Rf0e6ddb4044948fd">
             <a:extLst>
               <a:ext uri="{28A0092B-C50C-407E-A947-70E740481C1C}">
                 <a14:useLocalDpi xmlns:a14="http://schemas.microsoft.com/office/drawing/2010/main" val="0"/>
@@ -10369,7 +10369,7 @@
           <p:nvPr/>
         </p:nvPicPr>
         <p:blipFill>
-          <a:blip r:embed="R0a600ddb8e4648fa"/>
+          <a:blip r:embed="R103aeb1a480b4535"/>
           <a:stretch>
             <a:fillRect/>
           </a:stretch>
@@ -10402,7 +10402,7 @@
           <p:nvPr/>
         </p:nvPicPr>
         <p:blipFill rotWithShape="1">
-          <a:blip r:embed="R2429dcecb3c446aa">
+          <a:blip r:embed="Rd193b3bdac0e43bf">
             <a:extLst>
               <a:ext uri="{28A0092B-C50C-407E-A947-70E740481C1C}">
                 <a14:useLocalDpi xmlns:a14="http://schemas.microsoft.com/office/drawing/2010/main" val="0"/>
@@ -12120,7 +12120,7 @@
           <p:nvPr/>
         </p:nvPicPr>
         <p:blipFill>
-          <a:blip r:embed="R6b190e7c5c8047b7"/>
+          <a:blip r:embed="R82c1a3f69fc44814"/>
           <a:stretch>
             <a:fillRect/>
           </a:stretch>
@@ -12153,7 +12153,7 @@
           <p:nvPr/>
         </p:nvPicPr>
         <p:blipFill rotWithShape="1">
-          <a:blip r:embed="R3846afef12554268">
+          <a:blip r:embed="Rb52f2502c6e64dbd">
             <a:extLst>
               <a:ext uri="{28A0092B-C50C-407E-A947-70E740481C1C}">
                 <a14:useLocalDpi xmlns:a14="http://schemas.microsoft.com/office/drawing/2010/main" val="0"/>
